--- a/classes/parte-16-capstones-y-preparacion-de-certificaciones/301-roadmap-de-certificaciones-comptia-oscp-cissp-y-mas/clase-301-presentacion.pptx
+++ b/classes/parte-16-capstones-y-preparacion-de-certificaciones/301-roadmap-de-certificaciones-comptia-oscp-cissp-y-mas/clase-301-presentacion.pptx
@@ -3713,7 +3713,7 @@
                   <a:srgbClr val="22282E"/>
                 </a:solidFill>
               </a:rPr>
-              <a:t>•  Que el alumno construya un roadmap de certificaciones personalizado, entendiendo qué credencial demuestra qué competencia, cuál es el orden lógico según su perfil (ofensivo, defensivo o de gestión), y cuánto cuesta en dinero, tiempo y esfuerzo. Al final tendrás un plan escrito con hitos concretos alineado a tu objetivo profesional y a las 300 clases ya cursadas.</a:t>
+              <a:t>•  Que el alumno construya un roadmap de certificaciones personalizado, entendiendo qué credencial demuestra qué competencia, cuál es el orden lógico según su perfil (ofensivo, defensivo o de gestión), y cuánto cuesta en dinero, tiempo y esfuerzo. Al final tendrás un plan escrito con hitos concretos alineado a tu objetivo profesional y a las clases ya cursadas del programa.</a:t>
             </a:r>
           </a:p>
         </p:txBody>
